--- a/Submission/MockViva.pptx
+++ b/Submission/MockViva.pptx
@@ -16,7 +16,8 @@
     <p:sldId id="268" r:id="rId10"/>
     <p:sldId id="269" r:id="rId11"/>
     <p:sldId id="270" r:id="rId12"/>
-    <p:sldId id="271" r:id="rId13"/>
+    <p:sldId id="272" r:id="rId13"/>
+    <p:sldId id="271" r:id="rId14"/>
   </p:sldIdLst>
   <p:sldSz cx="12192000" cy="6858000"/>
   <p:notesSz cx="6858000" cy="9144000"/>
@@ -115,6 +116,11 @@
       </a:defRPr>
     </a:lvl9pPr>
   </p:defaultTextStyle>
+  <p:extLst>
+    <p:ext uri="{EFAFB233-063F-42B5-8137-9DF3F51BA10A}">
+      <p15:sldGuideLst xmlns:p15="http://schemas.microsoft.com/office/powerpoint/2012/main"/>
+    </p:ext>
+  </p:extLst>
 </p:presentation>
 </file>
 
@@ -265,7 +271,7 @@
           <a:p>
             <a:fld id="{048BBD51-FD46-433A-BCDC-3AD25804D4B9}" type="datetimeFigureOut">
               <a:rPr lang="en-GB" smtClean="0"/>
-              <a:t>20/08/2026</a:t>
+              <a:t>26/08/2026</a:t>
             </a:fld>
             <a:endParaRPr lang="en-GB"/>
           </a:p>
@@ -463,7 +469,7 @@
           <a:p>
             <a:fld id="{048BBD51-FD46-433A-BCDC-3AD25804D4B9}" type="datetimeFigureOut">
               <a:rPr lang="en-GB" smtClean="0"/>
-              <a:t>20/08/2026</a:t>
+              <a:t>26/08/2026</a:t>
             </a:fld>
             <a:endParaRPr lang="en-GB"/>
           </a:p>
@@ -671,7 +677,7 @@
           <a:p>
             <a:fld id="{048BBD51-FD46-433A-BCDC-3AD25804D4B9}" type="datetimeFigureOut">
               <a:rPr lang="en-GB" smtClean="0"/>
-              <a:t>20/08/2026</a:t>
+              <a:t>26/08/2026</a:t>
             </a:fld>
             <a:endParaRPr lang="en-GB"/>
           </a:p>
@@ -869,7 +875,7 @@
           <a:p>
             <a:fld id="{048BBD51-FD46-433A-BCDC-3AD25804D4B9}" type="datetimeFigureOut">
               <a:rPr lang="en-GB" smtClean="0"/>
-              <a:t>20/08/2026</a:t>
+              <a:t>26/08/2026</a:t>
             </a:fld>
             <a:endParaRPr lang="en-GB"/>
           </a:p>
@@ -1144,7 +1150,7 @@
           <a:p>
             <a:fld id="{048BBD51-FD46-433A-BCDC-3AD25804D4B9}" type="datetimeFigureOut">
               <a:rPr lang="en-GB" smtClean="0"/>
-              <a:t>20/08/2026</a:t>
+              <a:t>26/08/2026</a:t>
             </a:fld>
             <a:endParaRPr lang="en-GB"/>
           </a:p>
@@ -1409,7 +1415,7 @@
           <a:p>
             <a:fld id="{048BBD51-FD46-433A-BCDC-3AD25804D4B9}" type="datetimeFigureOut">
               <a:rPr lang="en-GB" smtClean="0"/>
-              <a:t>20/08/2026</a:t>
+              <a:t>26/08/2026</a:t>
             </a:fld>
             <a:endParaRPr lang="en-GB"/>
           </a:p>
@@ -1821,7 +1827,7 @@
           <a:p>
             <a:fld id="{048BBD51-FD46-433A-BCDC-3AD25804D4B9}" type="datetimeFigureOut">
               <a:rPr lang="en-GB" smtClean="0"/>
-              <a:t>20/08/2026</a:t>
+              <a:t>26/08/2026</a:t>
             </a:fld>
             <a:endParaRPr lang="en-GB"/>
           </a:p>
@@ -1962,7 +1968,7 @@
           <a:p>
             <a:fld id="{048BBD51-FD46-433A-BCDC-3AD25804D4B9}" type="datetimeFigureOut">
               <a:rPr lang="en-GB" smtClean="0"/>
-              <a:t>20/08/2026</a:t>
+              <a:t>26/08/2026</a:t>
             </a:fld>
             <a:endParaRPr lang="en-GB"/>
           </a:p>
@@ -2075,7 +2081,7 @@
           <a:p>
             <a:fld id="{048BBD51-FD46-433A-BCDC-3AD25804D4B9}" type="datetimeFigureOut">
               <a:rPr lang="en-GB" smtClean="0"/>
-              <a:t>20/08/2026</a:t>
+              <a:t>26/08/2026</a:t>
             </a:fld>
             <a:endParaRPr lang="en-GB"/>
           </a:p>
@@ -2386,7 +2392,7 @@
           <a:p>
             <a:fld id="{048BBD51-FD46-433A-BCDC-3AD25804D4B9}" type="datetimeFigureOut">
               <a:rPr lang="en-GB" smtClean="0"/>
-              <a:t>20/08/2026</a:t>
+              <a:t>26/08/2026</a:t>
             </a:fld>
             <a:endParaRPr lang="en-GB"/>
           </a:p>
@@ -2674,7 +2680,7 @@
           <a:p>
             <a:fld id="{048BBD51-FD46-433A-BCDC-3AD25804D4B9}" type="datetimeFigureOut">
               <a:rPr lang="en-GB" smtClean="0"/>
-              <a:t>20/08/2026</a:t>
+              <a:t>26/08/2026</a:t>
             </a:fld>
             <a:endParaRPr lang="en-GB"/>
           </a:p>
@@ -2915,7 +2921,7 @@
           <a:p>
             <a:fld id="{048BBD51-FD46-433A-BCDC-3AD25804D4B9}" type="datetimeFigureOut">
               <a:rPr lang="en-GB" smtClean="0"/>
-              <a:t>20/08/2026</a:t>
+              <a:t>26/08/2026</a:t>
             </a:fld>
             <a:endParaRPr lang="en-GB"/>
           </a:p>
@@ -3679,6 +3685,125 @@
 </file>
 
 <file path=ppt/slides/slide12.xml><?xml version="1.0" encoding="utf-8"?>
+<p:sld xmlns:a="http://schemas.openxmlformats.org/drawingml/2006/main" xmlns:r="http://schemas.openxmlformats.org/officeDocument/2006/relationships" xmlns:p="http://schemas.openxmlformats.org/presentationml/2006/main">
+  <p:cSld>
+    <p:spTree>
+      <p:nvGrpSpPr>
+        <p:cNvPr id="1" name=""/>
+        <p:cNvGrpSpPr/>
+        <p:nvPr/>
+      </p:nvGrpSpPr>
+      <p:grpSpPr>
+        <a:xfrm>
+          <a:off x="0" y="0"/>
+          <a:ext cx="0" cy="0"/>
+          <a:chOff x="0" y="0"/>
+          <a:chExt cx="0" cy="0"/>
+        </a:xfrm>
+      </p:grpSpPr>
+      <p:sp>
+        <p:nvSpPr>
+          <p:cNvPr id="2" name="Title 1">
+            <a:extLst>
+              <a:ext uri="{FF2B5EF4-FFF2-40B4-BE49-F238E27FC236}">
+                <a16:creationId xmlns:a16="http://schemas.microsoft.com/office/drawing/2014/main" id="{2AAE36F6-3FDD-FACF-3F94-8EA001B09A25}"/>
+              </a:ext>
+            </a:extLst>
+          </p:cNvPr>
+          <p:cNvSpPr>
+            <a:spLocks noGrp="1"/>
+          </p:cNvSpPr>
+          <p:nvPr>
+            <p:ph type="title"/>
+          </p:nvPr>
+        </p:nvSpPr>
+        <p:spPr/>
+        <p:txBody>
+          <a:bodyPr/>
+          <a:lstStyle/>
+          <a:p>
+            <a:r>
+              <a:rPr lang="en-GB" dirty="0"/>
+              <a:t>What didn’t work</a:t>
+            </a:r>
+          </a:p>
+        </p:txBody>
+      </p:sp>
+      <p:sp>
+        <p:nvSpPr>
+          <p:cNvPr id="3" name="Content Placeholder 2">
+            <a:extLst>
+              <a:ext uri="{FF2B5EF4-FFF2-40B4-BE49-F238E27FC236}">
+                <a16:creationId xmlns:a16="http://schemas.microsoft.com/office/drawing/2014/main" id="{A1A2AABE-4C65-4629-68E4-342D714104C3}"/>
+              </a:ext>
+            </a:extLst>
+          </p:cNvPr>
+          <p:cNvSpPr>
+            <a:spLocks noGrp="1"/>
+          </p:cNvSpPr>
+          <p:nvPr>
+            <p:ph idx="1"/>
+          </p:nvPr>
+        </p:nvSpPr>
+        <p:spPr/>
+        <p:txBody>
+          <a:bodyPr/>
+          <a:lstStyle/>
+          <a:p>
+            <a:r>
+              <a:rPr lang="en-GB" dirty="0"/>
+              <a:t>Third Prototype (Landmarks)</a:t>
+            </a:r>
+          </a:p>
+          <a:p>
+            <a:r>
+              <a:rPr lang="en-GB" dirty="0"/>
+              <a:t>Hard to differentiate between the second and third prototype</a:t>
+            </a:r>
+          </a:p>
+          <a:p>
+            <a:r>
+              <a:rPr lang="en-GB" dirty="0"/>
+              <a:t>Testing proved this too </a:t>
+            </a:r>
+          </a:p>
+          <a:p>
+            <a:endParaRPr lang="en-GB" dirty="0"/>
+          </a:p>
+          <a:p>
+            <a:r>
+              <a:rPr lang="en-GB" dirty="0"/>
+              <a:t>Changes made </a:t>
+            </a:r>
+          </a:p>
+          <a:p>
+            <a:r>
+              <a:rPr lang="en-GB" dirty="0"/>
+              <a:t>A lot more open space </a:t>
+            </a:r>
+          </a:p>
+          <a:p>
+            <a:r>
+              <a:rPr lang="en-GB" dirty="0"/>
+              <a:t>Reduce architectural guidance </a:t>
+            </a:r>
+          </a:p>
+        </p:txBody>
+      </p:sp>
+    </p:spTree>
+    <p:extLst>
+      <p:ext uri="{BB962C8B-B14F-4D97-AF65-F5344CB8AC3E}">
+        <p14:creationId xmlns:p14="http://schemas.microsoft.com/office/powerpoint/2010/main" val="3553895667"/>
+      </p:ext>
+    </p:extLst>
+  </p:cSld>
+  <p:clrMapOvr>
+    <a:masterClrMapping/>
+  </p:clrMapOvr>
+</p:sld>
+</file>
+
+<file path=ppt/slides/slide13.xml><?xml version="1.0" encoding="utf-8"?>
 <p:sld xmlns:a="http://schemas.openxmlformats.org/drawingml/2006/main" xmlns:r="http://schemas.openxmlformats.org/officeDocument/2006/relationships" xmlns:p="http://schemas.openxmlformats.org/presentationml/2006/main">
   <p:cSld>
     <p:spTree>
